--- a/Presentation.pptx
+++ b/Presentation.pptx
@@ -9,19 +9,19 @@
   </p:notesMasterIdLst>
   <p:sldIdLst>
     <p:sldId id="256" r:id="rId2"/>
-    <p:sldId id="258" r:id="rId3"/>
-    <p:sldId id="259" r:id="rId4"/>
-    <p:sldId id="261" r:id="rId5"/>
-    <p:sldId id="263" r:id="rId6"/>
-    <p:sldId id="262" r:id="rId7"/>
-    <p:sldId id="264" r:id="rId8"/>
-    <p:sldId id="267" r:id="rId9"/>
-    <p:sldId id="265" r:id="rId10"/>
-    <p:sldId id="268" r:id="rId11"/>
-    <p:sldId id="276" r:id="rId12"/>
-    <p:sldId id="271" r:id="rId13"/>
-    <p:sldId id="272" r:id="rId14"/>
-    <p:sldId id="280" r:id="rId15"/>
+    <p:sldId id="259" r:id="rId3"/>
+    <p:sldId id="261" r:id="rId4"/>
+    <p:sldId id="263" r:id="rId5"/>
+    <p:sldId id="262" r:id="rId6"/>
+    <p:sldId id="264" r:id="rId7"/>
+    <p:sldId id="267" r:id="rId8"/>
+    <p:sldId id="265" r:id="rId9"/>
+    <p:sldId id="268" r:id="rId10"/>
+    <p:sldId id="276" r:id="rId11"/>
+    <p:sldId id="271" r:id="rId12"/>
+    <p:sldId id="272" r:id="rId13"/>
+    <p:sldId id="280" r:id="rId14"/>
+    <p:sldId id="281" r:id="rId15"/>
   </p:sldIdLst>
   <p:sldSz cx="12192000" cy="6858000"/>
   <p:notesSz cx="6858000" cy="9144000"/>
@@ -120,6 +120,11 @@
       </a:defRPr>
     </a:lvl9pPr>
   </p:defaultTextStyle>
+  <p:extLst>
+    <p:ext uri="{EFAFB233-063F-42B5-8137-9DF3F51BA10A}">
+      <p15:sldGuideLst xmlns:p15="http://schemas.microsoft.com/office/powerpoint/2012/main"/>
+    </p:ext>
+  </p:extLst>
 </p:presentation>
 </file>
 
@@ -537,7 +542,7 @@
           <a:p>
             <a:fld id="{BF212FCB-550C-A949-B7AF-9F06AC2A10D4}" type="slidenum">
               <a:rPr lang="en-US" smtClean="0"/>
-              <a:t>3</a:t>
+              <a:t>2</a:t>
             </a:fld>
             <a:endParaRPr lang="en-US"/>
           </a:p>
@@ -621,7 +626,7 @@
           <a:p>
             <a:fld id="{BF212FCB-550C-A949-B7AF-9F06AC2A10D4}" type="slidenum">
               <a:rPr lang="en-US" smtClean="0"/>
-              <a:t>9</a:t>
+              <a:t>8</a:t>
             </a:fld>
             <a:endParaRPr lang="en-US"/>
           </a:p>
@@ -729,7 +734,7 @@
           <a:p>
             <a:fld id="{BF212FCB-550C-A949-B7AF-9F06AC2A10D4}" type="slidenum">
               <a:rPr lang="en-US" smtClean="0"/>
-              <a:t>10</a:t>
+              <a:t>9</a:t>
             </a:fld>
             <a:endParaRPr lang="en-US"/>
           </a:p>
@@ -837,7 +842,7 @@
           <a:p>
             <a:fld id="{BF212FCB-550C-A949-B7AF-9F06AC2A10D4}" type="slidenum">
               <a:rPr lang="en-US" smtClean="0"/>
-              <a:t>11</a:t>
+              <a:t>10</a:t>
             </a:fld>
             <a:endParaRPr lang="en-US"/>
           </a:p>
@@ -945,7 +950,7 @@
           <a:p>
             <a:fld id="{BF212FCB-550C-A949-B7AF-9F06AC2A10D4}" type="slidenum">
               <a:rPr lang="en-US" smtClean="0"/>
-              <a:t>13</a:t>
+              <a:t>12</a:t>
             </a:fld>
             <a:endParaRPr lang="en-US"/>
           </a:p>
@@ -1053,7 +1058,7 @@
           <a:p>
             <a:fld id="{BF212FCB-550C-A949-B7AF-9F06AC2A10D4}" type="slidenum">
               <a:rPr lang="en-US" smtClean="0"/>
-              <a:t>14</a:t>
+              <a:t>13</a:t>
             </a:fld>
             <a:endParaRPr lang="en-US"/>
           </a:p>
@@ -6888,102 +6893,6 @@
         <p:cNvPr id="1" name="">
           <a:extLst>
             <a:ext uri="{FF2B5EF4-FFF2-40B4-BE49-F238E27FC236}">
-              <a16:creationId xmlns:a16="http://schemas.microsoft.com/office/drawing/2014/main" id="{93A4344B-6598-2F8D-BDAC-90A5BA36FCDB}"/>
-            </a:ext>
-          </a:extLst>
-        </p:cNvPr>
-        <p:cNvGrpSpPr/>
-        <p:nvPr/>
-      </p:nvGrpSpPr>
-      <p:grpSpPr>
-        <a:xfrm>
-          <a:off x="0" y="0"/>
-          <a:ext cx="0" cy="0"/>
-          <a:chOff x="0" y="0"/>
-          <a:chExt cx="0" cy="0"/>
-        </a:xfrm>
-      </p:grpSpPr>
-      <p:sp>
-        <p:nvSpPr>
-          <p:cNvPr id="2" name="Title 1">
-            <a:extLst>
-              <a:ext uri="{FF2B5EF4-FFF2-40B4-BE49-F238E27FC236}">
-                <a16:creationId xmlns:a16="http://schemas.microsoft.com/office/drawing/2014/main" id="{3725CAC0-4240-B2FB-856F-D7CB4357539D}"/>
-              </a:ext>
-            </a:extLst>
-          </p:cNvPr>
-          <p:cNvSpPr>
-            <a:spLocks noGrp="1"/>
-          </p:cNvSpPr>
-          <p:nvPr>
-            <p:ph type="title"/>
-          </p:nvPr>
-        </p:nvSpPr>
-        <p:spPr/>
-        <p:txBody>
-          <a:bodyPr>
-            <a:normAutofit/>
-          </a:bodyPr>
-          <a:lstStyle/>
-          <a:p>
-            <a:r>
-              <a:rPr lang="en-US" dirty="0"/>
-              <a:t>Effect of Ablating the Survival Probability</a:t>
-            </a:r>
-          </a:p>
-        </p:txBody>
-      </p:sp>
-      <p:pic>
-        <p:nvPicPr>
-          <p:cNvPr id="4" name="Picture 3" descr="A graph of a normal growth&#10;&#10;AI-generated content may be incorrect.">
-            <a:extLst>
-              <a:ext uri="{FF2B5EF4-FFF2-40B4-BE49-F238E27FC236}">
-                <a16:creationId xmlns:a16="http://schemas.microsoft.com/office/drawing/2014/main" id="{A83A6AA6-A4BF-CFBE-B3CD-698AC8C5D465}"/>
-              </a:ext>
-            </a:extLst>
-          </p:cNvPr>
-          <p:cNvPicPr>
-            <a:picLocks noChangeAspect="1"/>
-          </p:cNvPicPr>
-          <p:nvPr/>
-        </p:nvPicPr>
-        <p:blipFill>
-          <a:blip r:embed="rId3"/>
-          <a:stretch>
-            <a:fillRect/>
-          </a:stretch>
-        </p:blipFill>
-        <p:spPr>
-          <a:xfrm>
-            <a:off x="677334" y="1930400"/>
-            <a:ext cx="6219103" cy="4572000"/>
-          </a:xfrm>
-          <a:prstGeom prst="rect">
-            <a:avLst/>
-          </a:prstGeom>
-        </p:spPr>
-      </p:pic>
-    </p:spTree>
-    <p:extLst>
-      <p:ext uri="{BB962C8B-B14F-4D97-AF65-F5344CB8AC3E}">
-        <p14:creationId xmlns:p14="http://schemas.microsoft.com/office/powerpoint/2010/main" val="3773992376"/>
-      </p:ext>
-    </p:extLst>
-  </p:cSld>
-  <p:clrMapOvr>
-    <a:masterClrMapping/>
-  </p:clrMapOvr>
-</p:sld>
-</file>
-
-<file path=ppt/slides/slide11.xml><?xml version="1.0" encoding="utf-8"?>
-<p:sld xmlns:a="http://schemas.openxmlformats.org/drawingml/2006/main" xmlns:r="http://schemas.openxmlformats.org/officeDocument/2006/relationships" xmlns:p="http://schemas.openxmlformats.org/presentationml/2006/main">
-  <p:cSld>
-    <p:spTree>
-      <p:nvGrpSpPr>
-        <p:cNvPr id="1" name="">
-          <a:extLst>
-            <a:ext uri="{FF2B5EF4-FFF2-40B4-BE49-F238E27FC236}">
               <a16:creationId xmlns:a16="http://schemas.microsoft.com/office/drawing/2014/main" id="{460BA1B6-A6C0-48E1-0111-2B4BAB1647A2}"/>
             </a:ext>
           </a:extLst>
@@ -7072,7 +6981,7 @@
 </p:sld>
 </file>
 
-<file path=ppt/slides/slide12.xml><?xml version="1.0" encoding="utf-8"?>
+<file path=ppt/slides/slide11.xml><?xml version="1.0" encoding="utf-8"?>
 <p:sld xmlns:a="http://schemas.openxmlformats.org/drawingml/2006/main" xmlns:r="http://schemas.openxmlformats.org/officeDocument/2006/relationships" xmlns:p="http://schemas.openxmlformats.org/presentationml/2006/main">
   <p:cSld>
     <p:spTree>
@@ -7118,7 +7027,7 @@
           <a:p>
             <a:r>
               <a:rPr lang="en-US" dirty="0"/>
-              <a:t>Results for Simulating No Malarial Transmission</a:t>
+              <a:t>Select Results on Simulating No Malarial Transmission</a:t>
             </a:r>
           </a:p>
         </p:txBody>
@@ -7136,7 +7045,7 @@
 </p:sld>
 </file>
 
-<file path=ppt/slides/slide13.xml><?xml version="1.0" encoding="utf-8"?>
+<file path=ppt/slides/slide12.xml><?xml version="1.0" encoding="utf-8"?>
 <p:sld xmlns:a="http://schemas.openxmlformats.org/drawingml/2006/main" xmlns:r="http://schemas.openxmlformats.org/officeDocument/2006/relationships" xmlns:p="http://schemas.openxmlformats.org/presentationml/2006/main">
   <p:cSld>
     <p:spTree>
@@ -7232,7 +7141,7 @@
 </p:sld>
 </file>
 
-<file path=ppt/slides/slide14.xml><?xml version="1.0" encoding="utf-8"?>
+<file path=ppt/slides/slide13.xml><?xml version="1.0" encoding="utf-8"?>
 <p:sld xmlns:a="http://schemas.openxmlformats.org/drawingml/2006/main" xmlns:r="http://schemas.openxmlformats.org/officeDocument/2006/relationships" xmlns:p="http://schemas.openxmlformats.org/presentationml/2006/main">
   <p:cSld>
     <p:spTree>
@@ -7319,6 +7228,111 @@
     <p:extLst>
       <p:ext uri="{BB962C8B-B14F-4D97-AF65-F5344CB8AC3E}">
         <p14:creationId xmlns:p14="http://schemas.microsoft.com/office/powerpoint/2010/main" val="2541369793"/>
+      </p:ext>
+    </p:extLst>
+  </p:cSld>
+  <p:clrMapOvr>
+    <a:masterClrMapping/>
+  </p:clrMapOvr>
+</p:sld>
+</file>
+
+<file path=ppt/slides/slide14.xml><?xml version="1.0" encoding="utf-8"?>
+<p:sld xmlns:a="http://schemas.openxmlformats.org/drawingml/2006/main" xmlns:r="http://schemas.openxmlformats.org/officeDocument/2006/relationships" xmlns:p="http://schemas.openxmlformats.org/presentationml/2006/main">
+  <p:cSld>
+    <p:spTree>
+      <p:nvGrpSpPr>
+        <p:cNvPr id="1" name=""/>
+        <p:cNvGrpSpPr/>
+        <p:nvPr/>
+      </p:nvGrpSpPr>
+      <p:grpSpPr>
+        <a:xfrm>
+          <a:off x="0" y="0"/>
+          <a:ext cx="0" cy="0"/>
+          <a:chOff x="0" y="0"/>
+          <a:chExt cx="0" cy="0"/>
+        </a:xfrm>
+      </p:grpSpPr>
+      <p:sp>
+        <p:nvSpPr>
+          <p:cNvPr id="2" name="Title 1">
+            <a:extLst>
+              <a:ext uri="{FF2B5EF4-FFF2-40B4-BE49-F238E27FC236}">
+                <a16:creationId xmlns:a16="http://schemas.microsoft.com/office/drawing/2014/main" id="{32D0DD65-C63C-F774-4290-BAAE97D71867}"/>
+              </a:ext>
+            </a:extLst>
+          </p:cNvPr>
+          <p:cNvSpPr>
+            <a:spLocks noGrp="1"/>
+          </p:cNvSpPr>
+          <p:nvPr>
+            <p:ph type="title"/>
+          </p:nvPr>
+        </p:nvSpPr>
+        <p:spPr/>
+        <p:txBody>
+          <a:bodyPr/>
+          <a:lstStyle/>
+          <a:p>
+            <a:r>
+              <a:rPr lang="en-US" dirty="0"/>
+              <a:t>In Conclusion:</a:t>
+            </a:r>
+          </a:p>
+        </p:txBody>
+      </p:sp>
+      <p:sp>
+        <p:nvSpPr>
+          <p:cNvPr id="3" name="Content Placeholder 2">
+            <a:extLst>
+              <a:ext uri="{FF2B5EF4-FFF2-40B4-BE49-F238E27FC236}">
+                <a16:creationId xmlns:a16="http://schemas.microsoft.com/office/drawing/2014/main" id="{ED0CE891-F887-6A00-93E4-0C67FA1F418B}"/>
+              </a:ext>
+            </a:extLst>
+          </p:cNvPr>
+          <p:cNvSpPr>
+            <a:spLocks noGrp="1"/>
+          </p:cNvSpPr>
+          <p:nvPr>
+            <p:ph idx="1"/>
+          </p:nvPr>
+        </p:nvSpPr>
+        <p:spPr/>
+        <p:txBody>
+          <a:bodyPr/>
+          <a:lstStyle/>
+          <a:p>
+            <a:r>
+              <a:rPr lang="en-US" dirty="0"/>
+              <a:t>The Leslie Model can be adapted to accurately model selective pressures on allele frequencies over long periods of time</a:t>
+            </a:r>
+          </a:p>
+          <a:p>
+            <a:r>
+              <a:rPr lang="en-US" dirty="0"/>
+              <a:t>There are numerous applications in retrospectively examining and explaining historic evolutionary trends</a:t>
+            </a:r>
+          </a:p>
+          <a:p>
+            <a:r>
+              <a:rPr lang="en-US" dirty="0"/>
+              <a:t>There are potential applications to predicting future evolutionary trends</a:t>
+            </a:r>
+          </a:p>
+          <a:p>
+            <a:pPr lvl="1"/>
+            <a:r>
+              <a:rPr lang="en-US" dirty="0"/>
+              <a:t>This may be more useful for species with quick turnover</a:t>
+            </a:r>
+          </a:p>
+        </p:txBody>
+      </p:sp>
+    </p:spTree>
+    <p:extLst>
+      <p:ext uri="{BB962C8B-B14F-4D97-AF65-F5344CB8AC3E}">
+        <p14:creationId xmlns:p14="http://schemas.microsoft.com/office/powerpoint/2010/main" val="3629257311"/>
       </p:ext>
     </p:extLst>
   </p:cSld>
@@ -7350,144 +7364,6 @@
           <p:cNvPr id="2" name="Title 1">
             <a:extLst>
               <a:ext uri="{FF2B5EF4-FFF2-40B4-BE49-F238E27FC236}">
-                <a16:creationId xmlns:a16="http://schemas.microsoft.com/office/drawing/2014/main" id="{3444E6FB-9024-B27D-B57C-7E619CBBF8DA}"/>
-              </a:ext>
-            </a:extLst>
-          </p:cNvPr>
-          <p:cNvSpPr>
-            <a:spLocks noGrp="1"/>
-          </p:cNvSpPr>
-          <p:nvPr>
-            <p:ph type="title"/>
-          </p:nvPr>
-        </p:nvSpPr>
-        <p:spPr/>
-        <p:txBody>
-          <a:bodyPr/>
-          <a:lstStyle/>
-          <a:p>
-            <a:r>
-              <a:rPr lang="en-US" dirty="0"/>
-              <a:t>Allele Inheritance in Lethal Diseases</a:t>
-            </a:r>
-          </a:p>
-        </p:txBody>
-      </p:sp>
-      <p:sp>
-        <p:nvSpPr>
-          <p:cNvPr id="3" name="Content Placeholder 2">
-            <a:extLst>
-              <a:ext uri="{FF2B5EF4-FFF2-40B4-BE49-F238E27FC236}">
-                <a16:creationId xmlns:a16="http://schemas.microsoft.com/office/drawing/2014/main" id="{DFB2ACEB-A719-1085-F772-5E389AC0AF68}"/>
-              </a:ext>
-            </a:extLst>
-          </p:cNvPr>
-          <p:cNvSpPr>
-            <a:spLocks noGrp="1"/>
-          </p:cNvSpPr>
-          <p:nvPr>
-            <p:ph idx="1"/>
-          </p:nvPr>
-        </p:nvSpPr>
-        <p:spPr/>
-        <p:txBody>
-          <a:bodyPr/>
-          <a:lstStyle/>
-          <a:p>
-            <a:r>
-              <a:rPr lang="en-US" dirty="0"/>
-              <a:t>Autosomal Dominant</a:t>
-            </a:r>
-          </a:p>
-          <a:p>
-            <a:pPr lvl="1"/>
-            <a:r>
-              <a:rPr lang="en-US" dirty="0"/>
-              <a:t>Huntington’s Disease</a:t>
-            </a:r>
-          </a:p>
-          <a:p>
-            <a:pPr lvl="2"/>
-            <a:r>
-              <a:rPr lang="en-US" dirty="0"/>
-              <a:t>1 in 200,000 individuals possess one allele for the disease</a:t>
-            </a:r>
-          </a:p>
-          <a:p>
-            <a:r>
-              <a:rPr lang="en-US" dirty="0"/>
-              <a:t>Autosomal Recessive</a:t>
-            </a:r>
-          </a:p>
-          <a:p>
-            <a:pPr lvl="1"/>
-            <a:r>
-              <a:rPr lang="en-US" dirty="0"/>
-              <a:t>Tay-Sachs Disease</a:t>
-            </a:r>
-          </a:p>
-          <a:p>
-            <a:pPr lvl="2"/>
-            <a:r>
-              <a:rPr lang="en-US" dirty="0"/>
-              <a:t>1 in 100,000 born homozygotes, 1 in 250 individuals are carriers</a:t>
-            </a:r>
-          </a:p>
-          <a:p>
-            <a:pPr lvl="1"/>
-            <a:r>
-              <a:rPr lang="en-US" dirty="0"/>
-              <a:t>Sickle Cell Anemia</a:t>
-            </a:r>
-          </a:p>
-          <a:p>
-            <a:pPr lvl="2"/>
-            <a:r>
-              <a:rPr lang="en-US" dirty="0"/>
-              <a:t>In certain regions: 2.6% born homozygotes, 29% of individuals are carriers</a:t>
-            </a:r>
-          </a:p>
-          <a:p>
-            <a:pPr lvl="2"/>
-            <a:endParaRPr lang="en-US" dirty="0"/>
-          </a:p>
-        </p:txBody>
-      </p:sp>
-    </p:spTree>
-    <p:extLst>
-      <p:ext uri="{BB962C8B-B14F-4D97-AF65-F5344CB8AC3E}">
-        <p14:creationId xmlns:p14="http://schemas.microsoft.com/office/powerpoint/2010/main" val="4135781282"/>
-      </p:ext>
-    </p:extLst>
-  </p:cSld>
-  <p:clrMapOvr>
-    <a:masterClrMapping/>
-  </p:clrMapOvr>
-</p:sld>
-</file>
-
-<file path=ppt/slides/slide3.xml><?xml version="1.0" encoding="utf-8"?>
-<p:sld xmlns:a="http://schemas.openxmlformats.org/drawingml/2006/main" xmlns:r="http://schemas.openxmlformats.org/officeDocument/2006/relationships" xmlns:p="http://schemas.openxmlformats.org/presentationml/2006/main">
-  <p:cSld>
-    <p:spTree>
-      <p:nvGrpSpPr>
-        <p:cNvPr id="1" name=""/>
-        <p:cNvGrpSpPr/>
-        <p:nvPr/>
-      </p:nvGrpSpPr>
-      <p:grpSpPr>
-        <a:xfrm>
-          <a:off x="0" y="0"/>
-          <a:ext cx="0" cy="0"/>
-          <a:chOff x="0" y="0"/>
-          <a:chExt cx="0" cy="0"/>
-        </a:xfrm>
-      </p:grpSpPr>
-      <p:sp>
-        <p:nvSpPr>
-          <p:cNvPr id="2" name="Title 1">
-            <a:extLst>
-              <a:ext uri="{FF2B5EF4-FFF2-40B4-BE49-F238E27FC236}">
                 <a16:creationId xmlns:a16="http://schemas.microsoft.com/office/drawing/2014/main" id="{6FF9115E-F52E-D96D-A8A9-4C34F862AE81}"/>
               </a:ext>
             </a:extLst>
@@ -7527,14 +7403,46 @@
             <p:ph idx="1"/>
           </p:nvPr>
         </p:nvSpPr>
-        <p:spPr/>
+        <p:spPr>
+          <a:xfrm>
+            <a:off x="677334" y="1270000"/>
+            <a:ext cx="8596668" cy="3880773"/>
+          </a:xfrm>
+        </p:spPr>
         <p:txBody>
           <a:bodyPr/>
           <a:lstStyle/>
           <a:p>
             <a:r>
               <a:rPr lang="en-US" dirty="0"/>
-              <a:t>Sickle Cell Anemia confers Malaria resistance!</a:t>
+              <a:t>Lethal Autosomal Recessive Diseases:</a:t>
+            </a:r>
+          </a:p>
+          <a:p>
+            <a:pPr lvl="1"/>
+            <a:r>
+              <a:rPr lang="en-US" dirty="0"/>
+              <a:t>Homozygous inheritance is fatal, carrier is asymptomatic</a:t>
+            </a:r>
+          </a:p>
+          <a:p>
+            <a:pPr lvl="1"/>
+            <a:r>
+              <a:rPr lang="en-US" dirty="0"/>
+              <a:t>Tay-Sachs Disease: 1 in 100,000 born homozygotes, 1 in 250 individuals are carriers</a:t>
+            </a:r>
+          </a:p>
+          <a:p>
+            <a:pPr lvl="1"/>
+            <a:r>
+              <a:rPr lang="en-US" dirty="0"/>
+              <a:t>Sickle Cell Anemia: In certain regions: 2.6% born homozygotes, 29% of individuals are carriers</a:t>
+            </a:r>
+          </a:p>
+          <a:p>
+            <a:r>
+              <a:rPr lang="en-US" dirty="0"/>
+              <a:t>Sickle Cell Anemia Carriers gain Malaria resistance!</a:t>
             </a:r>
           </a:p>
         </p:txBody>
@@ -7562,7 +7470,7 @@
         </p:blipFill>
         <p:spPr>
           <a:xfrm>
-            <a:off x="1156139" y="2898550"/>
+            <a:off x="794896" y="3553681"/>
             <a:ext cx="3594538" cy="2747840"/>
           </a:xfrm>
           <a:prstGeom prst="rect">
@@ -7599,7 +7507,7 @@
         </p:blipFill>
         <p:spPr bwMode="auto">
           <a:xfrm>
-            <a:off x="5105546" y="3001274"/>
+            <a:off x="4744303" y="3656405"/>
             <a:ext cx="3813587" cy="2542391"/>
           </a:xfrm>
           <a:prstGeom prst="roundRect">
@@ -7630,7 +7538,7 @@
 </p:sld>
 </file>
 
-<file path=ppt/slides/slide4.xml><?xml version="1.0" encoding="utf-8"?>
+<file path=ppt/slides/slide3.xml><?xml version="1.0" encoding="utf-8"?>
 <p:sld xmlns:a="http://schemas.openxmlformats.org/drawingml/2006/main" xmlns:r="http://schemas.openxmlformats.org/officeDocument/2006/relationships" xmlns:p="http://schemas.openxmlformats.org/presentationml/2006/main">
   <p:cSld>
     <p:spTree>
@@ -8728,7 +8636,7 @@
 </p:sld>
 </file>
 
-<file path=ppt/slides/slide5.xml><?xml version="1.0" encoding="utf-8"?>
+<file path=ppt/slides/slide4.xml><?xml version="1.0" encoding="utf-8"?>
 <p:sld xmlns:a="http://schemas.openxmlformats.org/drawingml/2006/main" xmlns:r="http://schemas.openxmlformats.org/officeDocument/2006/relationships" xmlns:p="http://schemas.openxmlformats.org/presentationml/2006/main">
   <p:cSld>
     <p:spTree>
@@ -11075,7 +10983,7 @@
 </p:sld>
 </file>
 
-<file path=ppt/slides/slide6.xml><?xml version="1.0" encoding="utf-8"?>
+<file path=ppt/slides/slide5.xml><?xml version="1.0" encoding="utf-8"?>
 <p:sld xmlns:a="http://schemas.openxmlformats.org/drawingml/2006/main" xmlns:r="http://schemas.openxmlformats.org/officeDocument/2006/relationships" xmlns:p="http://schemas.openxmlformats.org/presentationml/2006/main">
   <p:cSld>
     <p:spTree>
@@ -11229,6 +11137,168 @@
     <p:extLst>
       <p:ext uri="{BB962C8B-B14F-4D97-AF65-F5344CB8AC3E}">
         <p14:creationId xmlns:p14="http://schemas.microsoft.com/office/powerpoint/2010/main" val="613702938"/>
+      </p:ext>
+    </p:extLst>
+  </p:cSld>
+  <p:clrMapOvr>
+    <a:masterClrMapping/>
+  </p:clrMapOvr>
+</p:sld>
+</file>
+
+<file path=ppt/slides/slide6.xml><?xml version="1.0" encoding="utf-8"?>
+<p:sld xmlns:a="http://schemas.openxmlformats.org/drawingml/2006/main" xmlns:r="http://schemas.openxmlformats.org/officeDocument/2006/relationships" xmlns:p="http://schemas.openxmlformats.org/presentationml/2006/main">
+  <p:cSld>
+    <p:spTree>
+      <p:nvGrpSpPr>
+        <p:cNvPr id="1" name=""/>
+        <p:cNvGrpSpPr/>
+        <p:nvPr/>
+      </p:nvGrpSpPr>
+      <p:grpSpPr>
+        <a:xfrm>
+          <a:off x="0" y="0"/>
+          <a:ext cx="0" cy="0"/>
+          <a:chOff x="0" y="0"/>
+          <a:chExt cx="0" cy="0"/>
+        </a:xfrm>
+      </p:grpSpPr>
+      <p:sp>
+        <p:nvSpPr>
+          <p:cNvPr id="2" name="Title 1">
+            <a:extLst>
+              <a:ext uri="{FF2B5EF4-FFF2-40B4-BE49-F238E27FC236}">
+                <a16:creationId xmlns:a16="http://schemas.microsoft.com/office/drawing/2014/main" id="{D1C822D3-6094-D635-A713-67DE02755C27}"/>
+              </a:ext>
+            </a:extLst>
+          </p:cNvPr>
+          <p:cNvSpPr>
+            <a:spLocks noGrp="1"/>
+          </p:cNvSpPr>
+          <p:nvPr>
+            <p:ph type="title"/>
+          </p:nvPr>
+        </p:nvSpPr>
+        <p:spPr/>
+        <p:txBody>
+          <a:bodyPr/>
+          <a:lstStyle/>
+          <a:p>
+            <a:r>
+              <a:rPr lang="en-US" dirty="0"/>
+              <a:t>Simulation Setup and Assumptions</a:t>
+            </a:r>
+          </a:p>
+        </p:txBody>
+      </p:sp>
+      <p:sp>
+        <p:nvSpPr>
+          <p:cNvPr id="3" name="Content Placeholder 2">
+            <a:extLst>
+              <a:ext uri="{FF2B5EF4-FFF2-40B4-BE49-F238E27FC236}">
+                <a16:creationId xmlns:a16="http://schemas.microsoft.com/office/drawing/2014/main" id="{C8F8881A-D161-7EB3-493F-8E0BC9A21C65}"/>
+              </a:ext>
+            </a:extLst>
+          </p:cNvPr>
+          <p:cNvSpPr>
+            <a:spLocks noGrp="1"/>
+          </p:cNvSpPr>
+          <p:nvPr>
+            <p:ph idx="1"/>
+          </p:nvPr>
+        </p:nvSpPr>
+        <p:spPr>
+          <a:xfrm>
+            <a:off x="677334" y="1488613"/>
+            <a:ext cx="8596668" cy="5194409"/>
+          </a:xfrm>
+        </p:spPr>
+        <p:txBody>
+          <a:bodyPr>
+            <a:normAutofit/>
+          </a:bodyPr>
+          <a:lstStyle/>
+          <a:p>
+            <a:r>
+              <a:rPr lang="en-US" dirty="0"/>
+              <a:t>We want to simulate under circumstances similar to the pre-1800s, where the selective pressures would have occurred</a:t>
+            </a:r>
+          </a:p>
+          <a:p>
+            <a:pPr lvl="1"/>
+            <a:r>
+              <a:rPr lang="en-US" dirty="0"/>
+              <a:t>The life expectancy should be constant!</a:t>
+            </a:r>
+          </a:p>
+          <a:p>
+            <a:pPr lvl="2"/>
+            <a:r>
+              <a:rPr lang="en-US" dirty="0"/>
+              <a:t>The average life expectancy in the African Continent was around 26 before the 19th century</a:t>
+            </a:r>
+          </a:p>
+          <a:p>
+            <a:pPr lvl="1"/>
+            <a:r>
+              <a:rPr lang="en-US" dirty="0"/>
+              <a:t>We need data where there is no medical intervention (pre 1960-1970s)</a:t>
+            </a:r>
+          </a:p>
+          <a:p>
+            <a:pPr lvl="2"/>
+            <a:r>
+              <a:rPr lang="en-US" dirty="0"/>
+              <a:t>Sickle Cell Anemia homozygous inheritance assumed to be fatal</a:t>
+            </a:r>
+          </a:p>
+          <a:p>
+            <a:pPr lvl="2"/>
+            <a:r>
+              <a:rPr lang="en-US" dirty="0"/>
+              <a:t>Everyone gets Malaria in high transmission regions</a:t>
+            </a:r>
+          </a:p>
+          <a:p>
+            <a:pPr lvl="2"/>
+            <a:r>
+              <a:rPr lang="en-US" dirty="0"/>
+              <a:t>Malaria primarily affects those under the age of 5, causing 10% of deaths in high transmission regions (without medical intervention)</a:t>
+            </a:r>
+          </a:p>
+          <a:p>
+            <a:pPr lvl="2"/>
+            <a:r>
+              <a:rPr lang="en-US" dirty="0"/>
+              <a:t>Carriers of Sickle Cell are conferred a 90% decrease in Malarial fatalities </a:t>
+            </a:r>
+          </a:p>
+          <a:p>
+            <a:r>
+              <a:rPr lang="en-US" dirty="0"/>
+              <a:t>We run each simulation for 2000 steps (each step is 5 years)</a:t>
+            </a:r>
+          </a:p>
+          <a:p>
+            <a:pPr lvl="1"/>
+            <a:r>
+              <a:rPr lang="en-US" dirty="0"/>
+              <a:t>We typically see convergence of the proportion of carriers between 200 and 500 steps (1000 to 2500 years)</a:t>
+            </a:r>
+          </a:p>
+          <a:p>
+            <a:pPr lvl="1"/>
+            <a:r>
+              <a:rPr lang="en-US" dirty="0"/>
+              <a:t>Malaria has been documented since 2700 BCE</a:t>
+            </a:r>
+          </a:p>
+        </p:txBody>
+      </p:sp>
+    </p:spTree>
+    <p:extLst>
+      <p:ext uri="{BB962C8B-B14F-4D97-AF65-F5344CB8AC3E}">
+        <p14:creationId xmlns:p14="http://schemas.microsoft.com/office/powerpoint/2010/main" val="3483871628"/>
       </p:ext>
     </p:extLst>
   </p:cSld>
@@ -11260,7 +11330,7 @@
           <p:cNvPr id="2" name="Title 1">
             <a:extLst>
               <a:ext uri="{FF2B5EF4-FFF2-40B4-BE49-F238E27FC236}">
-                <a16:creationId xmlns:a16="http://schemas.microsoft.com/office/drawing/2014/main" id="{D1C822D3-6094-D635-A713-67DE02755C27}"/>
+                <a16:creationId xmlns:a16="http://schemas.microsoft.com/office/drawing/2014/main" id="{D2BE2EE1-80D5-FF95-E60B-9293F62AF96F}"/>
               </a:ext>
             </a:extLst>
           </p:cNvPr>
@@ -11278,94 +11348,7 @@
           <a:p>
             <a:r>
               <a:rPr lang="en-US" dirty="0"/>
-              <a:t>Simulation Setup and Assumptions</a:t>
-            </a:r>
-          </a:p>
-        </p:txBody>
-      </p:sp>
-      <p:sp>
-        <p:nvSpPr>
-          <p:cNvPr id="3" name="Content Placeholder 2">
-            <a:extLst>
-              <a:ext uri="{FF2B5EF4-FFF2-40B4-BE49-F238E27FC236}">
-                <a16:creationId xmlns:a16="http://schemas.microsoft.com/office/drawing/2014/main" id="{C8F8881A-D161-7EB3-493F-8E0BC9A21C65}"/>
-              </a:ext>
-            </a:extLst>
-          </p:cNvPr>
-          <p:cNvSpPr>
-            <a:spLocks noGrp="1"/>
-          </p:cNvSpPr>
-          <p:nvPr>
-            <p:ph idx="1"/>
-          </p:nvPr>
-        </p:nvSpPr>
-        <p:spPr>
-          <a:xfrm>
-            <a:off x="677334" y="1488613"/>
-            <a:ext cx="8596668" cy="4363547"/>
-          </a:xfrm>
-        </p:spPr>
-        <p:txBody>
-          <a:bodyPr>
-            <a:normAutofit/>
-          </a:bodyPr>
-          <a:lstStyle/>
-          <a:p>
-            <a:r>
-              <a:rPr lang="en-US" dirty="0"/>
-              <a:t>We want to simulate under circumstances similar to the pre-1800s</a:t>
-            </a:r>
-          </a:p>
-          <a:p>
-            <a:r>
-              <a:rPr lang="en-US" dirty="0"/>
-              <a:t>Malaria primarily affects those under the age of 5, causing 10% of deaths in high transmission regions (without medical intervention)</a:t>
-            </a:r>
-          </a:p>
-          <a:p>
-            <a:pPr lvl="1"/>
-            <a:r>
-              <a:rPr lang="en-US" dirty="0"/>
-              <a:t>We use a baseline age-specific survival rate and subtract 0.1 off the 0 to 5 category</a:t>
-            </a:r>
-          </a:p>
-          <a:p>
-            <a:pPr lvl="1"/>
-            <a:r>
-              <a:rPr lang="en-US" dirty="0"/>
-              <a:t>Everyone gets Malaria!</a:t>
-            </a:r>
-          </a:p>
-          <a:p>
-            <a:r>
-              <a:rPr lang="en-US" dirty="0"/>
-              <a:t>Carriers of Sickle Cell are conferred a 90% decrease in Malarial fatalities </a:t>
-            </a:r>
-          </a:p>
-          <a:p>
-            <a:r>
-              <a:rPr lang="en-US" dirty="0"/>
-              <a:t>The average life expectancy in the African Continent was around 26 before the 19th century</a:t>
-            </a:r>
-          </a:p>
-          <a:p>
-            <a:r>
-              <a:rPr lang="en-US" dirty="0"/>
-              <a:t>We run each simulation for 2000 steps (each step is 5 years)</a:t>
-            </a:r>
-          </a:p>
-          <a:p>
-            <a:pPr lvl="1"/>
-            <a:r>
-              <a:rPr lang="en-US" dirty="0"/>
-              <a:t>We typically see convergence of the proportion of carriers between 200 and 500 steps (1000 to 2500 years)</a:t>
-            </a:r>
-          </a:p>
-          <a:p>
-            <a:pPr lvl="1"/>
-            <a:r>
-              <a:rPr lang="en-US" dirty="0"/>
-              <a:t>Malaria has been documented since 2700 BCE</a:t>
+              <a:t>Select Results on Simulating High Malarial Transmission</a:t>
             </a:r>
           </a:p>
         </p:txBody>
@@ -11373,7 +11356,7 @@
     </p:spTree>
     <p:extLst>
       <p:ext uri="{BB962C8B-B14F-4D97-AF65-F5344CB8AC3E}">
-        <p14:creationId xmlns:p14="http://schemas.microsoft.com/office/powerpoint/2010/main" val="3483871628"/>
+        <p14:creationId xmlns:p14="http://schemas.microsoft.com/office/powerpoint/2010/main" val="3532964732"/>
       </p:ext>
     </p:extLst>
   </p:cSld>
@@ -11405,64 +11388,6 @@
           <p:cNvPr id="2" name="Title 1">
             <a:extLst>
               <a:ext uri="{FF2B5EF4-FFF2-40B4-BE49-F238E27FC236}">
-                <a16:creationId xmlns:a16="http://schemas.microsoft.com/office/drawing/2014/main" id="{D2BE2EE1-80D5-FF95-E60B-9293F62AF96F}"/>
-              </a:ext>
-            </a:extLst>
-          </p:cNvPr>
-          <p:cNvSpPr>
-            <a:spLocks noGrp="1"/>
-          </p:cNvSpPr>
-          <p:nvPr>
-            <p:ph type="title"/>
-          </p:nvPr>
-        </p:nvSpPr>
-        <p:spPr/>
-        <p:txBody>
-          <a:bodyPr/>
-          <a:lstStyle/>
-          <a:p>
-            <a:r>
-              <a:rPr lang="en-US" dirty="0"/>
-              <a:t>Results for Simulating High Malarial Transmission</a:t>
-            </a:r>
-          </a:p>
-        </p:txBody>
-      </p:sp>
-    </p:spTree>
-    <p:extLst>
-      <p:ext uri="{BB962C8B-B14F-4D97-AF65-F5344CB8AC3E}">
-        <p14:creationId xmlns:p14="http://schemas.microsoft.com/office/powerpoint/2010/main" val="3532964732"/>
-      </p:ext>
-    </p:extLst>
-  </p:cSld>
-  <p:clrMapOvr>
-    <a:masterClrMapping/>
-  </p:clrMapOvr>
-</p:sld>
-</file>
-
-<file path=ppt/slides/slide9.xml><?xml version="1.0" encoding="utf-8"?>
-<p:sld xmlns:a="http://schemas.openxmlformats.org/drawingml/2006/main" xmlns:r="http://schemas.openxmlformats.org/officeDocument/2006/relationships" xmlns:p="http://schemas.openxmlformats.org/presentationml/2006/main">
-  <p:cSld>
-    <p:spTree>
-      <p:nvGrpSpPr>
-        <p:cNvPr id="1" name=""/>
-        <p:cNvGrpSpPr/>
-        <p:nvPr/>
-      </p:nvGrpSpPr>
-      <p:grpSpPr>
-        <a:xfrm>
-          <a:off x="0" y="0"/>
-          <a:ext cx="0" cy="0"/>
-          <a:chOff x="0" y="0"/>
-          <a:chExt cx="0" cy="0"/>
-        </a:xfrm>
-      </p:grpSpPr>
-      <p:sp>
-        <p:nvSpPr>
-          <p:cNvPr id="2" name="Title 1">
-            <a:extLst>
-              <a:ext uri="{FF2B5EF4-FFF2-40B4-BE49-F238E27FC236}">
                 <a16:creationId xmlns:a16="http://schemas.microsoft.com/office/drawing/2014/main" id="{3D855AA6-D628-C6B8-527F-F02CB9BB18B7}"/>
               </a:ext>
             </a:extLst>
@@ -11522,6 +11447,102 @@
     <p:extLst>
       <p:ext uri="{BB962C8B-B14F-4D97-AF65-F5344CB8AC3E}">
         <p14:creationId xmlns:p14="http://schemas.microsoft.com/office/powerpoint/2010/main" val="3546823897"/>
+      </p:ext>
+    </p:extLst>
+  </p:cSld>
+  <p:clrMapOvr>
+    <a:masterClrMapping/>
+  </p:clrMapOvr>
+</p:sld>
+</file>
+
+<file path=ppt/slides/slide9.xml><?xml version="1.0" encoding="utf-8"?>
+<p:sld xmlns:a="http://schemas.openxmlformats.org/drawingml/2006/main" xmlns:r="http://schemas.openxmlformats.org/officeDocument/2006/relationships" xmlns:p="http://schemas.openxmlformats.org/presentationml/2006/main">
+  <p:cSld>
+    <p:spTree>
+      <p:nvGrpSpPr>
+        <p:cNvPr id="1" name="">
+          <a:extLst>
+            <a:ext uri="{FF2B5EF4-FFF2-40B4-BE49-F238E27FC236}">
+              <a16:creationId xmlns:a16="http://schemas.microsoft.com/office/drawing/2014/main" id="{93A4344B-6598-2F8D-BDAC-90A5BA36FCDB}"/>
+            </a:ext>
+          </a:extLst>
+        </p:cNvPr>
+        <p:cNvGrpSpPr/>
+        <p:nvPr/>
+      </p:nvGrpSpPr>
+      <p:grpSpPr>
+        <a:xfrm>
+          <a:off x="0" y="0"/>
+          <a:ext cx="0" cy="0"/>
+          <a:chOff x="0" y="0"/>
+          <a:chExt cx="0" cy="0"/>
+        </a:xfrm>
+      </p:grpSpPr>
+      <p:sp>
+        <p:nvSpPr>
+          <p:cNvPr id="2" name="Title 1">
+            <a:extLst>
+              <a:ext uri="{FF2B5EF4-FFF2-40B4-BE49-F238E27FC236}">
+                <a16:creationId xmlns:a16="http://schemas.microsoft.com/office/drawing/2014/main" id="{3725CAC0-4240-B2FB-856F-D7CB4357539D}"/>
+              </a:ext>
+            </a:extLst>
+          </p:cNvPr>
+          <p:cNvSpPr>
+            <a:spLocks noGrp="1"/>
+          </p:cNvSpPr>
+          <p:nvPr>
+            <p:ph type="title"/>
+          </p:nvPr>
+        </p:nvSpPr>
+        <p:spPr/>
+        <p:txBody>
+          <a:bodyPr>
+            <a:normAutofit/>
+          </a:bodyPr>
+          <a:lstStyle/>
+          <a:p>
+            <a:r>
+              <a:rPr lang="en-US" dirty="0"/>
+              <a:t>Effect of Ablating the Survival Probability</a:t>
+            </a:r>
+          </a:p>
+        </p:txBody>
+      </p:sp>
+      <p:pic>
+        <p:nvPicPr>
+          <p:cNvPr id="4" name="Picture 3" descr="A graph of a normal growth&#10;&#10;AI-generated content may be incorrect.">
+            <a:extLst>
+              <a:ext uri="{FF2B5EF4-FFF2-40B4-BE49-F238E27FC236}">
+                <a16:creationId xmlns:a16="http://schemas.microsoft.com/office/drawing/2014/main" id="{A83A6AA6-A4BF-CFBE-B3CD-698AC8C5D465}"/>
+              </a:ext>
+            </a:extLst>
+          </p:cNvPr>
+          <p:cNvPicPr>
+            <a:picLocks noChangeAspect="1"/>
+          </p:cNvPicPr>
+          <p:nvPr/>
+        </p:nvPicPr>
+        <p:blipFill>
+          <a:blip r:embed="rId3"/>
+          <a:stretch>
+            <a:fillRect/>
+          </a:stretch>
+        </p:blipFill>
+        <p:spPr>
+          <a:xfrm>
+            <a:off x="677334" y="1930400"/>
+            <a:ext cx="6219103" cy="4572000"/>
+          </a:xfrm>
+          <a:prstGeom prst="rect">
+            <a:avLst/>
+          </a:prstGeom>
+        </p:spPr>
+      </p:pic>
+    </p:spTree>
+    <p:extLst>
+      <p:ext uri="{BB962C8B-B14F-4D97-AF65-F5344CB8AC3E}">
+        <p14:creationId xmlns:p14="http://schemas.microsoft.com/office/powerpoint/2010/main" val="3773992376"/>
       </p:ext>
     </p:extLst>
   </p:cSld>
